--- a/MEE344_Machine_Learning_Presentation_Updated.pptx
+++ b/MEE344_Machine_Learning_Presentation_Updated.pptx
@@ -3200,7 +3200,7 @@
               </a:defRPr>
             </a:pPr>
             <a:r>
-              <a:t>An End-to-End Machine Learning Pipeline for the Turkish Power Grid</a:t>
+              <a:t>Predictive Modeling on the Turkish Power Grid</a:t>
             </a:r>
           </a:p>
         </p:txBody>
@@ -5544,7 +5544,7 @@
               </a:defRPr>
             </a:pPr>
             <a:r>
-              <a:t>Hourly Grid Load Forecasting Pipeline Successfully Deployed</a:t>
+              <a:t>Hourly Grid Load Forecasting Project Completed</a:t>
             </a:r>
           </a:p>
           <a:p>
@@ -5793,7 +5793,7 @@
               </a:defRPr>
             </a:pPr>
             <a:r>
-              <a:t>• Develop an optimized, end-to-end ML pipeline with complete reproducibility.</a:t>
+              <a:t>• Develop an optimized, machine learning model with complete reproducibility.</a:t>
             </a:r>
             <a:br/>
             <a:r>
